--- a/0_documents/2_docs/Defense_Presentation.pptx
+++ b/0_documents/2_docs/Defense_Presentation.pptx
@@ -7,6 +7,9 @@
   <p:notesMasterIdLst>
     <p:notesMasterId r:id="rId12"/>
   </p:notesMasterIdLst>
+  <p:handoutMasterIdLst>
+    <p:handoutMasterId r:id="rId13"/>
+  </p:handoutMasterIdLst>
   <p:sldIdLst>
     <p:sldId id="256" r:id="rId2"/>
     <p:sldId id="265" r:id="rId3"/>
@@ -120,8 +123,211 @@
     <p:ext uri="{EFAFB233-063F-42B5-8137-9DF3F51BA10A}">
       <p15:sldGuideLst xmlns:p15="http://schemas.microsoft.com/office/powerpoint/2012/main"/>
     </p:ext>
+    <p:ext uri="{2D200454-40CA-4A62-9FC3-DE9A4176ACB9}">
+      <p15:notesGuideLst xmlns:p15="http://schemas.microsoft.com/office/powerpoint/2012/main">
+        <p15:guide id="1" orient="horz" pos="2880" userDrawn="1">
+          <p15:clr>
+            <a:srgbClr val="A4A3A4"/>
+          </p15:clr>
+        </p15:guide>
+        <p15:guide id="2" pos="2160" userDrawn="1">
+          <p15:clr>
+            <a:srgbClr val="A4A3A4"/>
+          </p15:clr>
+        </p15:guide>
+      </p15:notesGuideLst>
+    </p:ext>
   </p:extLst>
 </p:presentation>
+</file>
+
+<file path=ppt/handoutMasters/handoutMaster1.xml><?xml version="1.0" encoding="utf-8"?>
+<p:handoutMaster xmlns:a="http://schemas.openxmlformats.org/drawingml/2006/main" xmlns:r="http://schemas.openxmlformats.org/officeDocument/2006/relationships" xmlns:p="http://schemas.openxmlformats.org/presentationml/2006/main">
+  <p:cSld>
+    <p:bg>
+      <p:bgRef idx="1001">
+        <a:schemeClr val="bg1"/>
+      </p:bgRef>
+    </p:bg>
+    <p:spTree>
+      <p:nvGrpSpPr>
+        <p:cNvPr id="1" name=""/>
+        <p:cNvGrpSpPr/>
+        <p:nvPr/>
+      </p:nvGrpSpPr>
+      <p:grpSpPr>
+        <a:xfrm>
+          <a:off x="0" y="0"/>
+          <a:ext cx="0" cy="0"/>
+          <a:chOff x="0" y="0"/>
+          <a:chExt cx="0" cy="0"/>
+        </a:xfrm>
+      </p:grpSpPr>
+      <p:sp>
+        <p:nvSpPr>
+          <p:cNvPr id="2" name="Header Placeholder 1">
+            <a:extLst>
+              <a:ext uri="{FF2B5EF4-FFF2-40B4-BE49-F238E27FC236}">
+                <a16:creationId xmlns:a16="http://schemas.microsoft.com/office/drawing/2014/main" id="{0B2F3536-7979-1A53-1725-86764C376A70}"/>
+              </a:ext>
+            </a:extLst>
+          </p:cNvPr>
+          <p:cNvSpPr>
+            <a:spLocks noGrp="1"/>
+          </p:cNvSpPr>
+          <p:nvPr>
+            <p:ph type="hdr" sz="quarter"/>
+          </p:nvPr>
+        </p:nvSpPr>
+        <p:spPr>
+          <a:xfrm>
+            <a:off x="0" y="0"/>
+            <a:ext cx="2971800" cy="458788"/>
+          </a:xfrm>
+          <a:prstGeom prst="rect">
+            <a:avLst/>
+          </a:prstGeom>
+        </p:spPr>
+        <p:txBody>
+          <a:bodyPr vert="horz" lIns="91440" tIns="45720" rIns="91440" bIns="45720" rtlCol="0"/>
+          <a:lstStyle>
+            <a:lvl1pPr algn="l">
+              <a:defRPr sz="1200"/>
+            </a:lvl1pPr>
+          </a:lstStyle>
+          <a:p>
+            <a:endParaRPr lang="en-US"/>
+          </a:p>
+        </p:txBody>
+      </p:sp>
+      <p:sp>
+        <p:nvSpPr>
+          <p:cNvPr id="3" name="Date Placeholder 2">
+            <a:extLst>
+              <a:ext uri="{FF2B5EF4-FFF2-40B4-BE49-F238E27FC236}">
+                <a16:creationId xmlns:a16="http://schemas.microsoft.com/office/drawing/2014/main" id="{5E28715C-5AB0-B4E4-400E-9A275FDF2A62}"/>
+              </a:ext>
+            </a:extLst>
+          </p:cNvPr>
+          <p:cNvSpPr>
+            <a:spLocks noGrp="1"/>
+          </p:cNvSpPr>
+          <p:nvPr>
+            <p:ph type="dt" sz="quarter" idx="1"/>
+          </p:nvPr>
+        </p:nvSpPr>
+        <p:spPr>
+          <a:xfrm>
+            <a:off x="3884613" y="0"/>
+            <a:ext cx="2971800" cy="458788"/>
+          </a:xfrm>
+          <a:prstGeom prst="rect">
+            <a:avLst/>
+          </a:prstGeom>
+        </p:spPr>
+        <p:txBody>
+          <a:bodyPr vert="horz" lIns="91440" tIns="45720" rIns="91440" bIns="45720" rtlCol="0"/>
+          <a:lstStyle>
+            <a:lvl1pPr algn="r">
+              <a:defRPr sz="1200"/>
+            </a:lvl1pPr>
+          </a:lstStyle>
+          <a:p>
+            <a:fld id="{F1E80695-122C-6447-BC5C-B02EBBCB624B}" type="datetimeFigureOut">
+              <a:rPr lang="en-US" smtClean="0"/>
+              <a:t>7/12/25</a:t>
+            </a:fld>
+            <a:endParaRPr lang="en-US"/>
+          </a:p>
+        </p:txBody>
+      </p:sp>
+      <p:sp>
+        <p:nvSpPr>
+          <p:cNvPr id="4" name="Footer Placeholder 3">
+            <a:extLst>
+              <a:ext uri="{FF2B5EF4-FFF2-40B4-BE49-F238E27FC236}">
+                <a16:creationId xmlns:a16="http://schemas.microsoft.com/office/drawing/2014/main" id="{94A0F193-DD03-9591-313C-B530303CB745}"/>
+              </a:ext>
+            </a:extLst>
+          </p:cNvPr>
+          <p:cNvSpPr>
+            <a:spLocks noGrp="1"/>
+          </p:cNvSpPr>
+          <p:nvPr>
+            <p:ph type="ftr" sz="quarter" idx="2"/>
+          </p:nvPr>
+        </p:nvSpPr>
+        <p:spPr>
+          <a:xfrm>
+            <a:off x="0" y="8685213"/>
+            <a:ext cx="2971800" cy="458787"/>
+          </a:xfrm>
+          <a:prstGeom prst="rect">
+            <a:avLst/>
+          </a:prstGeom>
+        </p:spPr>
+        <p:txBody>
+          <a:bodyPr vert="horz" lIns="91440" tIns="45720" rIns="91440" bIns="45720" rtlCol="0" anchor="b"/>
+          <a:lstStyle>
+            <a:lvl1pPr algn="l">
+              <a:defRPr sz="1200"/>
+            </a:lvl1pPr>
+          </a:lstStyle>
+          <a:p>
+            <a:endParaRPr lang="en-US"/>
+          </a:p>
+        </p:txBody>
+      </p:sp>
+      <p:sp>
+        <p:nvSpPr>
+          <p:cNvPr id="5" name="Slide Number Placeholder 4">
+            <a:extLst>
+              <a:ext uri="{FF2B5EF4-FFF2-40B4-BE49-F238E27FC236}">
+                <a16:creationId xmlns:a16="http://schemas.microsoft.com/office/drawing/2014/main" id="{198A396D-1476-F99A-45A2-67447AFA784A}"/>
+              </a:ext>
+            </a:extLst>
+          </p:cNvPr>
+          <p:cNvSpPr>
+            <a:spLocks noGrp="1"/>
+          </p:cNvSpPr>
+          <p:nvPr>
+            <p:ph type="sldNum" sz="quarter" idx="3"/>
+          </p:nvPr>
+        </p:nvSpPr>
+        <p:spPr>
+          <a:xfrm>
+            <a:off x="3884613" y="8685213"/>
+            <a:ext cx="2971800" cy="458787"/>
+          </a:xfrm>
+          <a:prstGeom prst="rect">
+            <a:avLst/>
+          </a:prstGeom>
+        </p:spPr>
+        <p:txBody>
+          <a:bodyPr vert="horz" lIns="91440" tIns="45720" rIns="91440" bIns="45720" rtlCol="0" anchor="b"/>
+          <a:lstStyle>
+            <a:lvl1pPr algn="r">
+              <a:defRPr sz="1200"/>
+            </a:lvl1pPr>
+          </a:lstStyle>
+          <a:p>
+            <a:fld id="{2B25928D-D7CA-5E4A-87DF-638ADE437A09}" type="slidenum">
+              <a:rPr lang="en-US" smtClean="0"/>
+              <a:t>‹#›</a:t>
+            </a:fld>
+            <a:endParaRPr lang="en-US"/>
+          </a:p>
+        </p:txBody>
+      </p:sp>
+    </p:spTree>
+    <p:extLst>
+      <p:ext uri="{BB962C8B-B14F-4D97-AF65-F5344CB8AC3E}">
+        <p14:creationId xmlns:p14="http://schemas.microsoft.com/office/powerpoint/2010/main" val="756415149"/>
+      </p:ext>
+    </p:extLst>
+  </p:cSld>
+  <p:clrMap bg1="lt1" tx1="dk1" bg2="lt2" tx2="dk2" accent1="accent1" accent2="accent2" accent3="accent3" accent4="accent4" accent5="accent5" accent6="accent6" hlink="hlink" folHlink="folHlink"/>
+</p:handoutMaster>
 </file>
 
 <file path=ppt/notesMasters/notesMaster1.xml><?xml version="1.0" encoding="utf-8"?>
@@ -206,7 +412,7 @@
           <a:p>
             <a:fld id="{F327B393-F539-B049-AF5E-74F8709E9A25}" type="datetimeFigureOut">
               <a:rPr lang="en-US" smtClean="0"/>
-              <a:t>7/5/25</a:t>
+              <a:t>7/12/25</a:t>
             </a:fld>
             <a:endParaRPr lang="en-US"/>
           </a:p>
@@ -473,6 +679,258 @@
 </p:notesMaster>
 </file>
 
+<file path=ppt/notesSlides/notesSlide1.xml><?xml version="1.0" encoding="utf-8"?>
+<p:notes xmlns:a="http://schemas.openxmlformats.org/drawingml/2006/main" xmlns:r="http://schemas.openxmlformats.org/officeDocument/2006/relationships" xmlns:p="http://schemas.openxmlformats.org/presentationml/2006/main">
+  <p:cSld>
+    <p:spTree>
+      <p:nvGrpSpPr>
+        <p:cNvPr id="1" name=""/>
+        <p:cNvGrpSpPr/>
+        <p:nvPr/>
+      </p:nvGrpSpPr>
+      <p:grpSpPr>
+        <a:xfrm>
+          <a:off x="0" y="0"/>
+          <a:ext cx="0" cy="0"/>
+          <a:chOff x="0" y="0"/>
+          <a:chExt cx="0" cy="0"/>
+        </a:xfrm>
+      </p:grpSpPr>
+      <p:sp>
+        <p:nvSpPr>
+          <p:cNvPr id="2" name="Slide Image Placeholder 1"/>
+          <p:cNvSpPr>
+            <a:spLocks noGrp="1" noRot="1" noChangeAspect="1"/>
+          </p:cNvSpPr>
+          <p:nvPr>
+            <p:ph type="sldImg"/>
+          </p:nvPr>
+        </p:nvSpPr>
+        <p:spPr/>
+      </p:sp>
+      <p:sp>
+        <p:nvSpPr>
+          <p:cNvPr id="3" name="Notes Placeholder 2"/>
+          <p:cNvSpPr>
+            <a:spLocks noGrp="1"/>
+          </p:cNvSpPr>
+          <p:nvPr>
+            <p:ph type="body" idx="1"/>
+          </p:nvPr>
+        </p:nvSpPr>
+        <p:spPr/>
+        <p:txBody>
+          <a:bodyPr/>
+          <a:lstStyle/>
+          <a:p>
+            <a:endParaRPr lang="en-US"/>
+          </a:p>
+        </p:txBody>
+      </p:sp>
+      <p:sp>
+        <p:nvSpPr>
+          <p:cNvPr id="4" name="Slide Number Placeholder 3"/>
+          <p:cNvSpPr>
+            <a:spLocks noGrp="1"/>
+          </p:cNvSpPr>
+          <p:nvPr>
+            <p:ph type="sldNum" sz="quarter" idx="5"/>
+          </p:nvPr>
+        </p:nvSpPr>
+        <p:spPr/>
+        <p:txBody>
+          <a:bodyPr/>
+          <a:lstStyle/>
+          <a:p>
+            <a:fld id="{0D39213C-6463-B34A-A66F-34F857D40089}" type="slidenum">
+              <a:rPr lang="en-US" smtClean="0"/>
+              <a:t>1</a:t>
+            </a:fld>
+            <a:endParaRPr lang="en-US"/>
+          </a:p>
+        </p:txBody>
+      </p:sp>
+    </p:spTree>
+    <p:extLst>
+      <p:ext uri="{BB962C8B-B14F-4D97-AF65-F5344CB8AC3E}">
+        <p14:creationId xmlns:p14="http://schemas.microsoft.com/office/powerpoint/2010/main" val="713569518"/>
+      </p:ext>
+    </p:extLst>
+  </p:cSld>
+  <p:clrMapOvr>
+    <a:masterClrMapping/>
+  </p:clrMapOvr>
+</p:notes>
+</file>
+
+<file path=ppt/notesSlides/notesSlide2.xml><?xml version="1.0" encoding="utf-8"?>
+<p:notes xmlns:a="http://schemas.openxmlformats.org/drawingml/2006/main" xmlns:r="http://schemas.openxmlformats.org/officeDocument/2006/relationships" xmlns:p="http://schemas.openxmlformats.org/presentationml/2006/main">
+  <p:cSld>
+    <p:spTree>
+      <p:nvGrpSpPr>
+        <p:cNvPr id="1" name=""/>
+        <p:cNvGrpSpPr/>
+        <p:nvPr/>
+      </p:nvGrpSpPr>
+      <p:grpSpPr>
+        <a:xfrm>
+          <a:off x="0" y="0"/>
+          <a:ext cx="0" cy="0"/>
+          <a:chOff x="0" y="0"/>
+          <a:chExt cx="0" cy="0"/>
+        </a:xfrm>
+      </p:grpSpPr>
+      <p:sp>
+        <p:nvSpPr>
+          <p:cNvPr id="2" name="Slide Image Placeholder 1"/>
+          <p:cNvSpPr>
+            <a:spLocks noGrp="1" noRot="1" noChangeAspect="1"/>
+          </p:cNvSpPr>
+          <p:nvPr>
+            <p:ph type="sldImg"/>
+          </p:nvPr>
+        </p:nvSpPr>
+        <p:spPr/>
+      </p:sp>
+      <p:sp>
+        <p:nvSpPr>
+          <p:cNvPr id="3" name="Notes Placeholder 2"/>
+          <p:cNvSpPr>
+            <a:spLocks noGrp="1"/>
+          </p:cNvSpPr>
+          <p:nvPr>
+            <p:ph type="body" idx="1"/>
+          </p:nvPr>
+        </p:nvSpPr>
+        <p:spPr/>
+        <p:txBody>
+          <a:bodyPr/>
+          <a:lstStyle/>
+          <a:p>
+            <a:endParaRPr lang="en-US" dirty="0"/>
+          </a:p>
+        </p:txBody>
+      </p:sp>
+      <p:sp>
+        <p:nvSpPr>
+          <p:cNvPr id="4" name="Slide Number Placeholder 3"/>
+          <p:cNvSpPr>
+            <a:spLocks noGrp="1"/>
+          </p:cNvSpPr>
+          <p:nvPr>
+            <p:ph type="sldNum" sz="quarter" idx="5"/>
+          </p:nvPr>
+        </p:nvSpPr>
+        <p:spPr/>
+        <p:txBody>
+          <a:bodyPr/>
+          <a:lstStyle/>
+          <a:p>
+            <a:fld id="{0D39213C-6463-B34A-A66F-34F857D40089}" type="slidenum">
+              <a:rPr lang="en-US" smtClean="0"/>
+              <a:t>2</a:t>
+            </a:fld>
+            <a:endParaRPr lang="en-US"/>
+          </a:p>
+        </p:txBody>
+      </p:sp>
+    </p:spTree>
+    <p:extLst>
+      <p:ext uri="{BB962C8B-B14F-4D97-AF65-F5344CB8AC3E}">
+        <p14:creationId xmlns:p14="http://schemas.microsoft.com/office/powerpoint/2010/main" val="1335823190"/>
+      </p:ext>
+    </p:extLst>
+  </p:cSld>
+  <p:clrMapOvr>
+    <a:masterClrMapping/>
+  </p:clrMapOvr>
+</p:notes>
+</file>
+
+<file path=ppt/notesSlides/notesSlide3.xml><?xml version="1.0" encoding="utf-8"?>
+<p:notes xmlns:a="http://schemas.openxmlformats.org/drawingml/2006/main" xmlns:r="http://schemas.openxmlformats.org/officeDocument/2006/relationships" xmlns:p="http://schemas.openxmlformats.org/presentationml/2006/main">
+  <p:cSld>
+    <p:spTree>
+      <p:nvGrpSpPr>
+        <p:cNvPr id="1" name=""/>
+        <p:cNvGrpSpPr/>
+        <p:nvPr/>
+      </p:nvGrpSpPr>
+      <p:grpSpPr>
+        <a:xfrm>
+          <a:off x="0" y="0"/>
+          <a:ext cx="0" cy="0"/>
+          <a:chOff x="0" y="0"/>
+          <a:chExt cx="0" cy="0"/>
+        </a:xfrm>
+      </p:grpSpPr>
+      <p:sp>
+        <p:nvSpPr>
+          <p:cNvPr id="2" name="Slide Image Placeholder 1"/>
+          <p:cNvSpPr>
+            <a:spLocks noGrp="1" noRot="1" noChangeAspect="1"/>
+          </p:cNvSpPr>
+          <p:nvPr>
+            <p:ph type="sldImg"/>
+          </p:nvPr>
+        </p:nvSpPr>
+        <p:spPr/>
+      </p:sp>
+      <p:sp>
+        <p:nvSpPr>
+          <p:cNvPr id="3" name="Notes Placeholder 2"/>
+          <p:cNvSpPr>
+            <a:spLocks noGrp="1"/>
+          </p:cNvSpPr>
+          <p:nvPr>
+            <p:ph type="body" idx="1"/>
+          </p:nvPr>
+        </p:nvSpPr>
+        <p:spPr/>
+        <p:txBody>
+          <a:bodyPr/>
+          <a:lstStyle/>
+          <a:p>
+            <a:endParaRPr lang="en-US"/>
+          </a:p>
+        </p:txBody>
+      </p:sp>
+      <p:sp>
+        <p:nvSpPr>
+          <p:cNvPr id="4" name="Slide Number Placeholder 3"/>
+          <p:cNvSpPr>
+            <a:spLocks noGrp="1"/>
+          </p:cNvSpPr>
+          <p:nvPr>
+            <p:ph type="sldNum" sz="quarter" idx="5"/>
+          </p:nvPr>
+        </p:nvSpPr>
+        <p:spPr/>
+        <p:txBody>
+          <a:bodyPr/>
+          <a:lstStyle/>
+          <a:p>
+            <a:fld id="{0D39213C-6463-B34A-A66F-34F857D40089}" type="slidenum">
+              <a:rPr lang="en-US" smtClean="0"/>
+              <a:t>8</a:t>
+            </a:fld>
+            <a:endParaRPr lang="en-US"/>
+          </a:p>
+        </p:txBody>
+      </p:sp>
+    </p:spTree>
+    <p:extLst>
+      <p:ext uri="{BB962C8B-B14F-4D97-AF65-F5344CB8AC3E}">
+        <p14:creationId xmlns:p14="http://schemas.microsoft.com/office/powerpoint/2010/main" val="1589657920"/>
+      </p:ext>
+    </p:extLst>
+  </p:cSld>
+  <p:clrMapOvr>
+    <a:masterClrMapping/>
+  </p:clrMapOvr>
+</p:notes>
+</file>
+
 <file path=ppt/slideLayouts/slideLayout1.xml><?xml version="1.0" encoding="utf-8"?>
 <p:sldLayout xmlns:a="http://schemas.openxmlformats.org/drawingml/2006/main" xmlns:r="http://schemas.openxmlformats.org/officeDocument/2006/relationships" xmlns:p="http://schemas.openxmlformats.org/presentationml/2006/main" type="title" preserve="1">
   <p:cSld name="Title Slide">
@@ -521,7 +979,7 @@
           </a:lstStyle>
           <a:p>
             <a:r>
-              <a:rPr lang="en-US"/>
+              <a:rPr lang="en-US" dirty="0"/>
               <a:t>Click to edit Master title style</a:t>
             </a:r>
           </a:p>
@@ -620,7 +1078,7 @@
           <a:p>
             <a:fld id="{EBEB1F40-A3FC-9F41-BE1C-7AD3C5927407}" type="datetimeFigureOut">
               <a:rPr lang="en-US" smtClean="0"/>
-              <a:t>7/5/25</a:t>
+              <a:t>7/12/25</a:t>
             </a:fld>
             <a:endParaRPr lang="en-US"/>
           </a:p>
@@ -818,7 +1276,7 @@
           <a:p>
             <a:fld id="{EBEB1F40-A3FC-9F41-BE1C-7AD3C5927407}" type="datetimeFigureOut">
               <a:rPr lang="en-US" smtClean="0"/>
-              <a:t>7/5/25</a:t>
+              <a:t>7/12/25</a:t>
             </a:fld>
             <a:endParaRPr lang="en-US"/>
           </a:p>
@@ -1026,7 +1484,7 @@
           <a:p>
             <a:fld id="{EBEB1F40-A3FC-9F41-BE1C-7AD3C5927407}" type="datetimeFigureOut">
               <a:rPr lang="en-US" smtClean="0"/>
-              <a:t>7/5/25</a:t>
+              <a:t>7/12/25</a:t>
             </a:fld>
             <a:endParaRPr lang="en-US"/>
           </a:p>
@@ -1134,8 +1592,8 @@
         </p:nvSpPr>
         <p:spPr>
           <a:xfrm>
-            <a:off x="838200" y="187738"/>
-            <a:ext cx="10515600" cy="986597"/>
+            <a:off x="838200" y="187739"/>
+            <a:ext cx="10515600" cy="662116"/>
           </a:xfrm>
         </p:spPr>
         <p:txBody>
@@ -1167,8 +1625,8 @@
         </p:nvSpPr>
         <p:spPr>
           <a:xfrm>
-            <a:off x="838200" y="1391478"/>
-            <a:ext cx="10515600" cy="4785485"/>
+            <a:off x="838200" y="1086928"/>
+            <a:ext cx="10515600" cy="5090035"/>
           </a:xfrm>
         </p:spPr>
         <p:txBody>
@@ -1177,35 +1635,35 @@
           <a:p>
             <a:pPr lvl="0"/>
             <a:r>
-              <a:rPr lang="en-US"/>
+              <a:rPr lang="en-US" dirty="0"/>
               <a:t>Click to edit Master text styles</a:t>
             </a:r>
           </a:p>
           <a:p>
             <a:pPr lvl="1"/>
             <a:r>
-              <a:rPr lang="en-US"/>
+              <a:rPr lang="en-US" dirty="0"/>
               <a:t>Second level</a:t>
             </a:r>
           </a:p>
           <a:p>
             <a:pPr lvl="2"/>
             <a:r>
-              <a:rPr lang="en-US"/>
+              <a:rPr lang="en-US" dirty="0"/>
               <a:t>Third level</a:t>
             </a:r>
           </a:p>
           <a:p>
             <a:pPr lvl="3"/>
             <a:r>
-              <a:rPr lang="en-US"/>
+              <a:rPr lang="en-US" dirty="0"/>
               <a:t>Fourth level</a:t>
             </a:r>
           </a:p>
           <a:p>
             <a:pPr lvl="4"/>
             <a:r>
-              <a:rPr lang="en-US"/>
+              <a:rPr lang="en-US" dirty="0"/>
               <a:t>Fifth level</a:t>
             </a:r>
           </a:p>
@@ -1234,7 +1692,7 @@
           <a:p>
             <a:fld id="{EBEB1F40-A3FC-9F41-BE1C-7AD3C5927407}" type="datetimeFigureOut">
               <a:rPr lang="en-US" smtClean="0"/>
-              <a:t>7/5/25</a:t>
+              <a:t>7/12/25</a:t>
             </a:fld>
             <a:endParaRPr lang="en-US"/>
           </a:p>
@@ -1509,7 +1967,7 @@
           <a:p>
             <a:fld id="{EBEB1F40-A3FC-9F41-BE1C-7AD3C5927407}" type="datetimeFigureOut">
               <a:rPr lang="en-US" smtClean="0"/>
-              <a:t>7/5/25</a:t>
+              <a:t>7/12/25</a:t>
             </a:fld>
             <a:endParaRPr lang="en-US"/>
           </a:p>
@@ -1615,13 +2073,18 @@
             <p:ph type="title"/>
           </p:nvPr>
         </p:nvSpPr>
-        <p:spPr/>
+        <p:spPr>
+          <a:xfrm>
+            <a:off x="838200" y="365126"/>
+            <a:ext cx="10515600" cy="538516"/>
+          </a:xfrm>
+        </p:spPr>
         <p:txBody>
           <a:bodyPr/>
           <a:lstStyle/>
           <a:p>
             <a:r>
-              <a:rPr lang="en-US"/>
+              <a:rPr lang="en-US" dirty="0"/>
               <a:t>Click to edit Master title style</a:t>
             </a:r>
           </a:p>
@@ -1774,7 +2237,7 @@
           <a:p>
             <a:fld id="{EBEB1F40-A3FC-9F41-BE1C-7AD3C5927407}" type="datetimeFigureOut">
               <a:rPr lang="en-US" smtClean="0"/>
-              <a:t>7/5/25</a:t>
+              <a:t>7/12/25</a:t>
             </a:fld>
             <a:endParaRPr lang="en-US"/>
           </a:p>
@@ -1883,7 +2346,7 @@
         <p:spPr>
           <a:xfrm>
             <a:off x="839788" y="365125"/>
-            <a:ext cx="10515600" cy="1325563"/>
+            <a:ext cx="10515600" cy="742913"/>
           </a:xfrm>
         </p:spPr>
         <p:txBody>
@@ -1891,7 +2354,7 @@
           <a:lstStyle/>
           <a:p>
             <a:r>
-              <a:rPr lang="en-US"/>
+              <a:rPr lang="en-US" dirty="0"/>
               <a:t>Click to edit Master title style</a:t>
             </a:r>
           </a:p>
@@ -2186,7 +2649,7 @@
           <a:p>
             <a:fld id="{EBEB1F40-A3FC-9F41-BE1C-7AD3C5927407}" type="datetimeFigureOut">
               <a:rPr lang="en-US" smtClean="0"/>
-              <a:t>7/5/25</a:t>
+              <a:t>7/12/25</a:t>
             </a:fld>
             <a:endParaRPr lang="en-US"/>
           </a:p>
@@ -2327,7 +2790,7 @@
           <a:p>
             <a:fld id="{EBEB1F40-A3FC-9F41-BE1C-7AD3C5927407}" type="datetimeFigureOut">
               <a:rPr lang="en-US" smtClean="0"/>
-              <a:t>7/5/25</a:t>
+              <a:t>7/12/25</a:t>
             </a:fld>
             <a:endParaRPr lang="en-US"/>
           </a:p>
@@ -2440,7 +2903,7 @@
           <a:p>
             <a:fld id="{EBEB1F40-A3FC-9F41-BE1C-7AD3C5927407}" type="datetimeFigureOut">
               <a:rPr lang="en-US" smtClean="0"/>
-              <a:t>7/5/25</a:t>
+              <a:t>7/12/25</a:t>
             </a:fld>
             <a:endParaRPr lang="en-US"/>
           </a:p>
@@ -2751,7 +3214,7 @@
           <a:p>
             <a:fld id="{EBEB1F40-A3FC-9F41-BE1C-7AD3C5927407}" type="datetimeFigureOut">
               <a:rPr lang="en-US" smtClean="0"/>
-              <a:t>7/5/25</a:t>
+              <a:t>7/12/25</a:t>
             </a:fld>
             <a:endParaRPr lang="en-US"/>
           </a:p>
@@ -3039,7 +3502,7 @@
           <a:p>
             <a:fld id="{EBEB1F40-A3FC-9F41-BE1C-7AD3C5927407}" type="datetimeFigureOut">
               <a:rPr lang="en-US" smtClean="0"/>
-              <a:t>7/5/25</a:t>
+              <a:t>7/12/25</a:t>
             </a:fld>
             <a:endParaRPr lang="en-US"/>
           </a:p>
@@ -3116,9 +3579,12 @@
 <p:sldMaster xmlns:a="http://schemas.openxmlformats.org/drawingml/2006/main" xmlns:r="http://schemas.openxmlformats.org/officeDocument/2006/relationships" xmlns:p="http://schemas.openxmlformats.org/presentationml/2006/main">
   <p:cSld>
     <p:bg>
-      <p:bgRef idx="1001">
-        <a:schemeClr val="bg1"/>
-      </p:bgRef>
+      <p:bgPr>
+        <a:solidFill>
+          <a:schemeClr val="accent1"/>
+        </a:solidFill>
+        <a:effectLst/>
+      </p:bgPr>
     </p:bg>
     <p:spTree>
       <p:nvGrpSpPr>
@@ -3152,8 +3618,8 @@
         </p:nvSpPr>
         <p:spPr>
           <a:xfrm>
-            <a:off x="838200" y="365125"/>
-            <a:ext cx="10515600" cy="1325563"/>
+            <a:off x="838200" y="365126"/>
+            <a:ext cx="10515600" cy="775186"/>
           </a:xfrm>
           <a:prstGeom prst="rect">
             <a:avLst/>
@@ -3190,8 +3656,8 @@
         </p:nvSpPr>
         <p:spPr>
           <a:xfrm>
-            <a:off x="838200" y="1825625"/>
-            <a:ext cx="10515600" cy="4351338"/>
+            <a:off x="838200" y="1140312"/>
+            <a:ext cx="10515600" cy="5036651"/>
           </a:xfrm>
           <a:prstGeom prst="rect">
             <a:avLst/>
@@ -3205,35 +3671,35 @@
           <a:p>
             <a:pPr lvl="0"/>
             <a:r>
-              <a:rPr lang="en-US"/>
+              <a:rPr lang="en-US" dirty="0"/>
               <a:t>Click to edit Master text styles</a:t>
             </a:r>
           </a:p>
           <a:p>
             <a:pPr lvl="1"/>
             <a:r>
-              <a:rPr lang="en-US"/>
+              <a:rPr lang="en-US" dirty="0"/>
               <a:t>Second level</a:t>
             </a:r>
           </a:p>
           <a:p>
             <a:pPr lvl="2"/>
             <a:r>
-              <a:rPr lang="en-US"/>
+              <a:rPr lang="en-US" dirty="0"/>
               <a:t>Third level</a:t>
             </a:r>
           </a:p>
           <a:p>
             <a:pPr lvl="3"/>
             <a:r>
-              <a:rPr lang="en-US"/>
+              <a:rPr lang="en-US" dirty="0"/>
               <a:t>Fourth level</a:t>
             </a:r>
           </a:p>
           <a:p>
             <a:pPr lvl="4"/>
             <a:r>
-              <a:rPr lang="en-US"/>
+              <a:rPr lang="en-US" dirty="0"/>
               <a:t>Fifth level</a:t>
             </a:r>
           </a:p>
@@ -3280,7 +3746,7 @@
           <a:p>
             <a:fld id="{EBEB1F40-A3FC-9F41-BE1C-7AD3C5927407}" type="datetimeFigureOut">
               <a:rPr lang="en-US" smtClean="0"/>
-              <a:t>7/5/25</a:t>
+              <a:t>7/12/25</a:t>
             </a:fld>
             <a:endParaRPr lang="en-US"/>
           </a:p>
@@ -7820,8 +8286,8 @@
         </p:nvSpPr>
         <p:spPr>
           <a:xfrm>
-            <a:off x="1371599" y="2318197"/>
-            <a:ext cx="9724031" cy="3683358"/>
+            <a:off x="3067291" y="2318197"/>
+            <a:ext cx="8028339" cy="3683358"/>
           </a:xfrm>
         </p:spPr>
         <p:txBody>
@@ -7834,6 +8300,36 @@
           </a:p>
         </p:txBody>
       </p:sp>
+      <p:pic>
+        <p:nvPicPr>
+          <p:cNvPr id="3" name="Picture 2" descr="A diagram of a process&#10;&#10;AI-generated content may be incorrect.">
+            <a:extLst>
+              <a:ext uri="{FF2B5EF4-FFF2-40B4-BE49-F238E27FC236}">
+                <a16:creationId xmlns:a16="http://schemas.microsoft.com/office/drawing/2014/main" id="{F62AEDCF-C2AE-6048-CEFE-B3384EC41D02}"/>
+              </a:ext>
+            </a:extLst>
+          </p:cNvPr>
+          <p:cNvPicPr>
+            <a:picLocks noChangeAspect="1"/>
+          </p:cNvPicPr>
+          <p:nvPr/>
+        </p:nvPicPr>
+        <p:blipFill>
+          <a:blip r:embed="rId2"/>
+          <a:stretch>
+            <a:fillRect/>
+          </a:stretch>
+        </p:blipFill>
+        <p:spPr>
+          <a:xfrm>
+            <a:off x="164058" y="1885279"/>
+            <a:ext cx="2604135" cy="3905885"/>
+          </a:xfrm>
+          <a:prstGeom prst="rect">
+            <a:avLst/>
+          </a:prstGeom>
+        </p:spPr>
+      </p:pic>
     </p:spTree>
     <p:extLst>
       <p:ext uri="{BB962C8B-B14F-4D97-AF65-F5344CB8AC3E}">
@@ -9447,4 +9943,319 @@
     </a:ext>
   </a:extLst>
 </a:theme>
+</file>
+
+<file path=ppt/theme/theme3.xml><?xml version="1.0" encoding="utf-8"?>
+<a:theme xmlns:a="http://schemas.openxmlformats.org/drawingml/2006/main" name="Office Theme">
+  <a:themeElements>
+    <a:clrScheme name="Office">
+      <a:dk1>
+        <a:sysClr val="windowText" lastClr="000000"/>
+      </a:dk1>
+      <a:lt1>
+        <a:sysClr val="window" lastClr="FFFFFF"/>
+      </a:lt1>
+      <a:dk2>
+        <a:srgbClr val="0E2841"/>
+      </a:dk2>
+      <a:lt2>
+        <a:srgbClr val="E8E8E8"/>
+      </a:lt2>
+      <a:accent1>
+        <a:srgbClr val="156082"/>
+      </a:accent1>
+      <a:accent2>
+        <a:srgbClr val="E97132"/>
+      </a:accent2>
+      <a:accent3>
+        <a:srgbClr val="196B24"/>
+      </a:accent3>
+      <a:accent4>
+        <a:srgbClr val="0F9ED5"/>
+      </a:accent4>
+      <a:accent5>
+        <a:srgbClr val="A02B93"/>
+      </a:accent5>
+      <a:accent6>
+        <a:srgbClr val="4EA72E"/>
+      </a:accent6>
+      <a:hlink>
+        <a:srgbClr val="467886"/>
+      </a:hlink>
+      <a:folHlink>
+        <a:srgbClr val="96607D"/>
+      </a:folHlink>
+    </a:clrScheme>
+    <a:fontScheme name="Office">
+      <a:majorFont>
+        <a:latin typeface="Aptos Display" panose="02110004020202020204"/>
+        <a:ea typeface=""/>
+        <a:cs typeface=""/>
+        <a:font script="Jpan" typeface="游ゴシック Light"/>
+        <a:font script="Hang" typeface="맑은 고딕"/>
+        <a:font script="Hans" typeface="等线 Light"/>
+        <a:font script="Hant" typeface="新細明體"/>
+        <a:font script="Arab" typeface="Times New Roman"/>
+        <a:font script="Hebr" typeface="Times New Roman"/>
+        <a:font script="Thai" typeface="Angsana New"/>
+        <a:font script="Ethi" typeface="Nyala"/>
+        <a:font script="Beng" typeface="Vrinda"/>
+        <a:font script="Gujr" typeface="Shruti"/>
+        <a:font script="Khmr" typeface="MoolBoran"/>
+        <a:font script="Knda" typeface="Tunga"/>
+        <a:font script="Guru" typeface="Raavi"/>
+        <a:font script="Cans" typeface="Euphemia"/>
+        <a:font script="Cher" typeface="Plantagenet Cherokee"/>
+        <a:font script="Yiii" typeface="Microsoft Yi Baiti"/>
+        <a:font script="Tibt" typeface="Microsoft Himalaya"/>
+        <a:font script="Thaa" typeface="MV Boli"/>
+        <a:font script="Deva" typeface="Mangal"/>
+        <a:font script="Telu" typeface="Gautami"/>
+        <a:font script="Taml" typeface="Latha"/>
+        <a:font script="Syrc" typeface="Estrangelo Edessa"/>
+        <a:font script="Orya" typeface="Kalinga"/>
+        <a:font script="Mlym" typeface="Kartika"/>
+        <a:font script="Laoo" typeface="DokChampa"/>
+        <a:font script="Sinh" typeface="Iskoola Pota"/>
+        <a:font script="Mong" typeface="Mongolian Baiti"/>
+        <a:font script="Viet" typeface="Times New Roman"/>
+        <a:font script="Uigh" typeface="Microsoft Uighur"/>
+        <a:font script="Geor" typeface="Sylfaen"/>
+        <a:font script="Armn" typeface="Arial"/>
+        <a:font script="Bugi" typeface="Leelawadee UI"/>
+        <a:font script="Bopo" typeface="Microsoft JhengHei"/>
+        <a:font script="Java" typeface="Javanese Text"/>
+        <a:font script="Lisu" typeface="Segoe UI"/>
+        <a:font script="Mymr" typeface="Myanmar Text"/>
+        <a:font script="Nkoo" typeface="Ebrima"/>
+        <a:font script="Olck" typeface="Nirmala UI"/>
+        <a:font script="Osma" typeface="Ebrima"/>
+        <a:font script="Phag" typeface="Phagspa"/>
+        <a:font script="Syrn" typeface="Estrangelo Edessa"/>
+        <a:font script="Syrj" typeface="Estrangelo Edessa"/>
+        <a:font script="Syre" typeface="Estrangelo Edessa"/>
+        <a:font script="Sora" typeface="Nirmala UI"/>
+        <a:font script="Tale" typeface="Microsoft Tai Le"/>
+        <a:font script="Talu" typeface="Microsoft New Tai Lue"/>
+        <a:font script="Tfng" typeface="Ebrima"/>
+      </a:majorFont>
+      <a:minorFont>
+        <a:latin typeface="Aptos" panose="02110004020202020204"/>
+        <a:ea typeface=""/>
+        <a:cs typeface=""/>
+        <a:font script="Jpan" typeface="游ゴシック"/>
+        <a:font script="Hang" typeface="맑은 고딕"/>
+        <a:font script="Hans" typeface="等线"/>
+        <a:font script="Hant" typeface="新細明體"/>
+        <a:font script="Arab" typeface="Arial"/>
+        <a:font script="Hebr" typeface="Arial"/>
+        <a:font script="Thai" typeface="Cordia New"/>
+        <a:font script="Ethi" typeface="Nyala"/>
+        <a:font script="Beng" typeface="Vrinda"/>
+        <a:font script="Gujr" typeface="Shruti"/>
+        <a:font script="Khmr" typeface="DaunPenh"/>
+        <a:font script="Knda" typeface="Tunga"/>
+        <a:font script="Guru" typeface="Raavi"/>
+        <a:font script="Cans" typeface="Euphemia"/>
+        <a:font script="Cher" typeface="Plantagenet Cherokee"/>
+        <a:font script="Yiii" typeface="Microsoft Yi Baiti"/>
+        <a:font script="Tibt" typeface="Microsoft Himalaya"/>
+        <a:font script="Thaa" typeface="MV Boli"/>
+        <a:font script="Deva" typeface="Mangal"/>
+        <a:font script="Telu" typeface="Gautami"/>
+        <a:font script="Taml" typeface="Latha"/>
+        <a:font script="Syrc" typeface="Estrangelo Edessa"/>
+        <a:font script="Orya" typeface="Kalinga"/>
+        <a:font script="Mlym" typeface="Kartika"/>
+        <a:font script="Laoo" typeface="DokChampa"/>
+        <a:font script="Sinh" typeface="Iskoola Pota"/>
+        <a:font script="Mong" typeface="Mongolian Baiti"/>
+        <a:font script="Viet" typeface="Arial"/>
+        <a:font script="Uigh" typeface="Microsoft Uighur"/>
+        <a:font script="Geor" typeface="Sylfaen"/>
+        <a:font script="Armn" typeface="Arial"/>
+        <a:font script="Bugi" typeface="Leelawadee UI"/>
+        <a:font script="Bopo" typeface="Microsoft JhengHei"/>
+        <a:font script="Java" typeface="Javanese Text"/>
+        <a:font script="Lisu" typeface="Segoe UI"/>
+        <a:font script="Mymr" typeface="Myanmar Text"/>
+        <a:font script="Nkoo" typeface="Ebrima"/>
+        <a:font script="Olck" typeface="Nirmala UI"/>
+        <a:font script="Osma" typeface="Ebrima"/>
+        <a:font script="Phag" typeface="Phagspa"/>
+        <a:font script="Syrn" typeface="Estrangelo Edessa"/>
+        <a:font script="Syrj" typeface="Estrangelo Edessa"/>
+        <a:font script="Syre" typeface="Estrangelo Edessa"/>
+        <a:font script="Sora" typeface="Nirmala UI"/>
+        <a:font script="Tale" typeface="Microsoft Tai Le"/>
+        <a:font script="Talu" typeface="Microsoft New Tai Lue"/>
+        <a:font script="Tfng" typeface="Ebrima"/>
+      </a:minorFont>
+    </a:fontScheme>
+    <a:fmtScheme name="Office">
+      <a:fillStyleLst>
+        <a:solidFill>
+          <a:schemeClr val="phClr"/>
+        </a:solidFill>
+        <a:gradFill rotWithShape="1">
+          <a:gsLst>
+            <a:gs pos="0">
+              <a:schemeClr val="phClr">
+                <a:lumMod val="110000"/>
+                <a:satMod val="105000"/>
+                <a:tint val="67000"/>
+              </a:schemeClr>
+            </a:gs>
+            <a:gs pos="50000">
+              <a:schemeClr val="phClr">
+                <a:lumMod val="105000"/>
+                <a:satMod val="103000"/>
+                <a:tint val="73000"/>
+              </a:schemeClr>
+            </a:gs>
+            <a:gs pos="100000">
+              <a:schemeClr val="phClr">
+                <a:lumMod val="105000"/>
+                <a:satMod val="109000"/>
+                <a:tint val="81000"/>
+              </a:schemeClr>
+            </a:gs>
+          </a:gsLst>
+          <a:lin ang="5400000" scaled="0"/>
+        </a:gradFill>
+        <a:gradFill rotWithShape="1">
+          <a:gsLst>
+            <a:gs pos="0">
+              <a:schemeClr val="phClr">
+                <a:satMod val="103000"/>
+                <a:lumMod val="102000"/>
+                <a:tint val="94000"/>
+              </a:schemeClr>
+            </a:gs>
+            <a:gs pos="50000">
+              <a:schemeClr val="phClr">
+                <a:satMod val="110000"/>
+                <a:lumMod val="100000"/>
+                <a:shade val="100000"/>
+              </a:schemeClr>
+            </a:gs>
+            <a:gs pos="100000">
+              <a:schemeClr val="phClr">
+                <a:lumMod val="99000"/>
+                <a:satMod val="120000"/>
+                <a:shade val="78000"/>
+              </a:schemeClr>
+            </a:gs>
+          </a:gsLst>
+          <a:lin ang="5400000" scaled="0"/>
+        </a:gradFill>
+      </a:fillStyleLst>
+      <a:lnStyleLst>
+        <a:ln w="12700" cap="flat" cmpd="sng" algn="ctr">
+          <a:solidFill>
+            <a:schemeClr val="phClr"/>
+          </a:solidFill>
+          <a:prstDash val="solid"/>
+          <a:miter lim="800000"/>
+        </a:ln>
+        <a:ln w="19050" cap="flat" cmpd="sng" algn="ctr">
+          <a:solidFill>
+            <a:schemeClr val="phClr"/>
+          </a:solidFill>
+          <a:prstDash val="solid"/>
+          <a:miter lim="800000"/>
+        </a:ln>
+        <a:ln w="25400" cap="flat" cmpd="sng" algn="ctr">
+          <a:solidFill>
+            <a:schemeClr val="phClr"/>
+          </a:solidFill>
+          <a:prstDash val="solid"/>
+          <a:miter lim="800000"/>
+        </a:ln>
+      </a:lnStyleLst>
+      <a:effectStyleLst>
+        <a:effectStyle>
+          <a:effectLst/>
+        </a:effectStyle>
+        <a:effectStyle>
+          <a:effectLst/>
+        </a:effectStyle>
+        <a:effectStyle>
+          <a:effectLst>
+            <a:outerShdw blurRad="57150" dist="19050" dir="5400000" algn="ctr" rotWithShape="0">
+              <a:srgbClr val="000000">
+                <a:alpha val="63000"/>
+              </a:srgbClr>
+            </a:outerShdw>
+          </a:effectLst>
+        </a:effectStyle>
+      </a:effectStyleLst>
+      <a:bgFillStyleLst>
+        <a:solidFill>
+          <a:schemeClr val="phClr"/>
+        </a:solidFill>
+        <a:solidFill>
+          <a:schemeClr val="phClr">
+            <a:tint val="95000"/>
+            <a:satMod val="170000"/>
+          </a:schemeClr>
+        </a:solidFill>
+        <a:gradFill rotWithShape="1">
+          <a:gsLst>
+            <a:gs pos="0">
+              <a:schemeClr val="phClr">
+                <a:tint val="93000"/>
+                <a:satMod val="150000"/>
+                <a:shade val="98000"/>
+                <a:lumMod val="102000"/>
+              </a:schemeClr>
+            </a:gs>
+            <a:gs pos="50000">
+              <a:schemeClr val="phClr">
+                <a:tint val="98000"/>
+                <a:satMod val="130000"/>
+                <a:shade val="90000"/>
+                <a:lumMod val="103000"/>
+              </a:schemeClr>
+            </a:gs>
+            <a:gs pos="100000">
+              <a:schemeClr val="phClr">
+                <a:shade val="63000"/>
+                <a:satMod val="120000"/>
+              </a:schemeClr>
+            </a:gs>
+          </a:gsLst>
+          <a:lin ang="5400000" scaled="0"/>
+        </a:gradFill>
+      </a:bgFillStyleLst>
+    </a:fmtScheme>
+  </a:themeElements>
+  <a:objectDefaults>
+    <a:lnDef>
+      <a:spPr/>
+      <a:bodyPr/>
+      <a:lstStyle/>
+      <a:style>
+        <a:lnRef idx="2">
+          <a:schemeClr val="accent1"/>
+        </a:lnRef>
+        <a:fillRef idx="0">
+          <a:schemeClr val="accent1"/>
+        </a:fillRef>
+        <a:effectRef idx="1">
+          <a:schemeClr val="accent1"/>
+        </a:effectRef>
+        <a:fontRef idx="minor">
+          <a:schemeClr val="tx1"/>
+        </a:fontRef>
+      </a:style>
+    </a:lnDef>
+  </a:objectDefaults>
+  <a:extraClrSchemeLst/>
+  <a:extLst>
+    <a:ext uri="{05A4C25C-085E-4340-85A3-A5531E510DB2}">
+      <thm15:themeFamily xmlns:thm15="http://schemas.microsoft.com/office/thememl/2012/main" name="Office Theme" id="{2E142A2C-CD16-42D6-873A-C26D2A0506FA}" vid="{1BDDFF52-6CD6-40A5-AB3C-68EB2F1E4D0A}"/>
+    </a:ext>
+  </a:extLst>
+</a:theme>
 </file>